--- a/templates/modern.pptx
+++ b/templates/modern.pptx
@@ -863,7 +863,7 @@
       </p:grpSpPr>
       <p:sp>
         <p:nvSpPr>
-          <p:cNvPr id="7" name="Picture Placeholder 6">
+          <p:cNvPr id="7" name="image">
             <a:extLst>
               <a:ext uri="{FF2B5EF4-FFF2-40B4-BE49-F238E27FC236}">
                 <a16:creationId xmlns:a16="http://schemas.microsoft.com/office/drawing/2014/main" id="{7A7F58C7-D277-8F14-F024-4B41D20D054F}"/>
@@ -908,7 +908,7 @@
       </p:sp>
       <p:sp>
         <p:nvSpPr>
-          <p:cNvPr id="6" name="Title 1">
+          <p:cNvPr id="6" name="title">
             <a:extLst>
               <a:ext uri="{FF2B5EF4-FFF2-40B4-BE49-F238E27FC236}">
                 <a16:creationId xmlns:a16="http://schemas.microsoft.com/office/drawing/2014/main" id="{2E8C189B-2E00-67DA-E342-3440F5EBB4CE}"/>
@@ -981,7 +981,7 @@
       </p:grpSpPr>
       <p:sp>
         <p:nvSpPr>
-          <p:cNvPr id="2" name="Title 1">
+          <p:cNvPr id="2" name="title">
             <a:extLst>
               <a:ext uri="{FF2B5EF4-FFF2-40B4-BE49-F238E27FC236}">
                 <a16:creationId xmlns:a16="http://schemas.microsoft.com/office/drawing/2014/main" id="{32772C41-A024-2F33-1F04-21E003FA7291}"/>
@@ -1021,7 +1021,7 @@
       </p:sp>
       <p:sp>
         <p:nvSpPr>
-          <p:cNvPr id="12" name="Picture Placeholder 11">
+          <p:cNvPr id="12" name="image">
             <a:extLst>
               <a:ext uri="{FF2B5EF4-FFF2-40B4-BE49-F238E27FC236}">
                 <a16:creationId xmlns:a16="http://schemas.microsoft.com/office/drawing/2014/main" id="{82836803-D9E6-3DF1-3B90-1E7E677CC7B7}"/>
@@ -1067,7 +1067,7 @@
       </p:sp>
       <p:sp>
         <p:nvSpPr>
-          <p:cNvPr id="3" name="Subtitle 2">
+          <p:cNvPr id="3" name="subtitle">
             <a:extLst>
               <a:ext uri="{FF2B5EF4-FFF2-40B4-BE49-F238E27FC236}">
                 <a16:creationId xmlns:a16="http://schemas.microsoft.com/office/drawing/2014/main" id="{473BC2DF-9C2A-052C-AD2C-0A8ABAA50374}"/>
@@ -1193,7 +1193,7 @@
       </p:grpSpPr>
       <p:sp>
         <p:nvSpPr>
-          <p:cNvPr id="2" name="Title 1">
+          <p:cNvPr id="2" name="title">
             <a:extLst>
               <a:ext uri="{FF2B5EF4-FFF2-40B4-BE49-F238E27FC236}">
                 <a16:creationId xmlns:a16="http://schemas.microsoft.com/office/drawing/2014/main" id="{F657BD59-35CC-9BB3-8621-6FA3356F81AA}"/>
@@ -1232,7 +1232,7 @@
       </p:sp>
       <p:sp>
         <p:nvSpPr>
-          <p:cNvPr id="3" name="Content Placeholder 2">
+          <p:cNvPr id="3" name="body">
             <a:extLst>
               <a:ext uri="{FF2B5EF4-FFF2-40B4-BE49-F238E27FC236}">
                 <a16:creationId xmlns:a16="http://schemas.microsoft.com/office/drawing/2014/main" id="{A772710C-A212-1B12-06CD-FA2A14F89D68}"/>
@@ -1469,7 +1469,7 @@
       </p:grpSpPr>
       <p:sp>
         <p:nvSpPr>
-          <p:cNvPr id="2" name="Title 1">
+          <p:cNvPr id="2" name="title">
             <a:extLst>
               <a:ext uri="{FF2B5EF4-FFF2-40B4-BE49-F238E27FC236}">
                 <a16:creationId xmlns:a16="http://schemas.microsoft.com/office/drawing/2014/main" id="{32772C41-A024-2F33-1F04-21E003FA7291}"/>
@@ -1508,7 +1508,7 @@
       </p:sp>
       <p:sp>
         <p:nvSpPr>
-          <p:cNvPr id="3" name="Subtitle 2">
+          <p:cNvPr id="3" name="subtitle">
             <a:extLst>
               <a:ext uri="{FF2B5EF4-FFF2-40B4-BE49-F238E27FC236}">
                 <a16:creationId xmlns:a16="http://schemas.microsoft.com/office/drawing/2014/main" id="{473BC2DF-9C2A-052C-AD2C-0A8ABAA50374}"/>
@@ -1634,7 +1634,7 @@
       </p:grpSpPr>
       <p:sp>
         <p:nvSpPr>
-          <p:cNvPr id="2" name="Title 1"/>
+          <p:cNvPr id="2" name="title"/>
           <p:cNvSpPr>
             <a:spLocks noGrp="1"/>
           </p:cNvSpPr>
@@ -1743,7 +1743,7 @@
       </p:grpSpPr>
       <p:sp>
         <p:nvSpPr>
-          <p:cNvPr id="12" name="Picture Placeholder 11">
+          <p:cNvPr id="12" name="image">
             <a:extLst>
               <a:ext uri="{FF2B5EF4-FFF2-40B4-BE49-F238E27FC236}">
                 <a16:creationId xmlns:a16="http://schemas.microsoft.com/office/drawing/2014/main" id="{76EE6F3F-63EB-5C0E-2307-3B7CBBA1C374}"/>
@@ -1791,7 +1791,7 @@
       </p:sp>
       <p:sp>
         <p:nvSpPr>
-          <p:cNvPr id="2" name="Title 1">
+          <p:cNvPr id="2" name="title">
             <a:extLst>
               <a:ext uri="{FF2B5EF4-FFF2-40B4-BE49-F238E27FC236}">
                 <a16:creationId xmlns:a16="http://schemas.microsoft.com/office/drawing/2014/main" id="{F657BD59-35CC-9BB3-8621-6FA3356F81AA}"/>
@@ -1837,7 +1837,7 @@
       </p:sp>
       <p:sp>
         <p:nvSpPr>
-          <p:cNvPr id="10" name="Text Placeholder 9">
+          <p:cNvPr id="10" name="subtitle">
             <a:extLst>
               <a:ext uri="{FF2B5EF4-FFF2-40B4-BE49-F238E27FC236}">
                 <a16:creationId xmlns:a16="http://schemas.microsoft.com/office/drawing/2014/main" id="{E12DA517-30B0-BC62-0422-F995FB9189E2}"/>
@@ -1959,7 +1959,7 @@
       </p:grpSpPr>
       <p:sp>
         <p:nvSpPr>
-          <p:cNvPr id="2" name="Title 1"/>
+          <p:cNvPr id="2" name="title"/>
           <p:cNvSpPr>
             <a:spLocks noGrp="1"/>
           </p:cNvSpPr>
@@ -1992,7 +1992,7 @@
       </p:sp>
       <p:sp>
         <p:nvSpPr>
-          <p:cNvPr id="3" name="Content Placeholder 2"/>
+          <p:cNvPr id="3" name="body"/>
           <p:cNvSpPr>
             <a:spLocks noGrp="1"/>
           </p:cNvSpPr>
@@ -2058,7 +2058,7 @@
       </p:sp>
       <p:sp>
         <p:nvSpPr>
-          <p:cNvPr id="4" name="Content Placeholder 3"/>
+          <p:cNvPr id="4" name="body_2"/>
           <p:cNvSpPr>
             <a:spLocks noGrp="1"/>
           </p:cNvSpPr>
@@ -2174,7 +2174,7 @@
       </p:grpSpPr>
       <p:sp>
         <p:nvSpPr>
-          <p:cNvPr id="2" name="Title 1"/>
+          <p:cNvPr id="2" name="title"/>
           <p:cNvSpPr>
             <a:spLocks noGrp="1"/>
           </p:cNvSpPr>
